--- a/docs/milestone_1/StationZero_Pitch.pptx
+++ b/docs/milestone_1/StationZero_Pitch.pptx
@@ -4,17 +4,16 @@
   <p:sldMasterIdLst>
     <p:sldMasterId id="2147483648" r:id="rId1"/>
   </p:sldMasterIdLst>
+  <p:notesMasterIdLst>
+    <p:notesMasterId r:id="rId7"/>
+  </p:notesMasterIdLst>
   <p:sldIdLst>
     <p:sldId id="256" r:id="rId2"/>
     <p:sldId id="257" r:id="rId3"/>
     <p:sldId id="258" r:id="rId4"/>
-    <p:sldId id="259" r:id="rId5"/>
-    <p:sldId id="260" r:id="rId6"/>
-    <p:sldId id="261" r:id="rId7"/>
+    <p:sldId id="260" r:id="rId5"/>
+    <p:sldId id="261" r:id="rId6"/>
   </p:sldIdLst>
-  <p:notesMasterIdLst>
-    <p:notesMasterId r:id="rId8"/>
-  </p:notesMasterIdLst>
   <p:sldSz cx="12192000" cy="6858000"/>
   <p:notesSz cx="6858000" cy="12192000"/>
   <p:defaultTextStyle>
@@ -109,7 +108,71 @@
       </a:defRPr>
     </a:lvl9pPr>
   </p:defaultTextStyle>
+  <p:extLst>
+    <p:ext uri="{EFAFB233-063F-42B5-8137-9DF3F51BA10A}">
+      <p15:sldGuideLst xmlns:p15="http://schemas.microsoft.com/office/powerpoint/2012/main"/>
+    </p:ext>
+  </p:extLst>
 </p:presentation>
+</file>
+
+<file path=ppt/revisionInfo.xml><?xml version="1.0" encoding="utf-8"?>
+<p1510:revInfo xmlns:a="http://schemas.openxmlformats.org/drawingml/2006/main" xmlns:r="http://schemas.openxmlformats.org/officeDocument/2006/relationships" xmlns:p1510="http://schemas.microsoft.com/office/powerpoint/2015/10/main">
+  <p1510:revLst>
+    <p1510:client id="{D70660FF-D03D-13A2-133A-28A0C02773F0}" v="7" dt="2026-09-16T15:45:43.159"/>
+  </p1510:revLst>
+</p1510:revInfo>
+</file>
+
+<file path=ppt/changesInfos/changesInfo1.xml><?xml version="1.0" encoding="utf-8"?>
+<pc:chgInfo xmlns:a="http://schemas.openxmlformats.org/drawingml/2006/main" xmlns:r="http://schemas.openxmlformats.org/officeDocument/2006/relationships" xmlns:ac="http://schemas.microsoft.com/office/drawing/2013/main/command" xmlns:pc="http://schemas.microsoft.com/office/powerpoint/2013/main/command">
+  <pc:docChgLst>
+    <pc:chgData clId="Web-{D70660FF-D03D-13A2-133A-28A0C02773F0}"/>
+    <pc:docChg chg="delSld modSld">
+      <pc:chgData name="" userId="" providerId="" clId="Web-{D70660FF-D03D-13A2-133A-28A0C02773F0}" dt="2026-09-16T15:45:43.159" v="6" actId="20577"/>
+      <pc:docMkLst>
+        <pc:docMk/>
+      </pc:docMkLst>
+      <pc:sldChg chg="modSp">
+        <pc:chgData name="" userId="" providerId="" clId="Web-{D70660FF-D03D-13A2-133A-28A0C02773F0}" dt="2026-09-16T15:45:43.159" v="6" actId="20577"/>
+        <pc:sldMkLst>
+          <pc:docMk/>
+          <pc:sldMk cId="0" sldId="256"/>
+        </pc:sldMkLst>
+        <pc:spChg chg="mod">
+          <ac:chgData name="" userId="" providerId="" clId="Web-{D70660FF-D03D-13A2-133A-28A0C02773F0}" dt="2026-09-16T15:45:43.159" v="6" actId="20577"/>
+          <ac:spMkLst>
+            <pc:docMk/>
+            <pc:sldMk cId="0" sldId="256"/>
+            <ac:spMk id="2" creationId="{00000000-0000-0000-0000-000000000000}"/>
+          </ac:spMkLst>
+        </pc:spChg>
+      </pc:sldChg>
+      <pc:sldChg chg="del">
+        <pc:chgData name="" userId="" providerId="" clId="Web-{D70660FF-D03D-13A2-133A-28A0C02773F0}" dt="2026-09-16T15:45:28.565" v="1"/>
+        <pc:sldMkLst>
+          <pc:docMk/>
+          <pc:sldMk cId="0" sldId="259"/>
+        </pc:sldMkLst>
+      </pc:sldChg>
+      <pc:sldChg chg="delSp">
+        <pc:chgData name="" userId="" providerId="" clId="Web-{D70660FF-D03D-13A2-133A-28A0C02773F0}" dt="2026-09-16T15:45:06.377" v="0"/>
+        <pc:sldMkLst>
+          <pc:docMk/>
+          <pc:sldMk cId="0" sldId="261"/>
+        </pc:sldMkLst>
+        <pc:spChg chg="del">
+          <ac:chgData name="" userId="" providerId="" clId="Web-{D70660FF-D03D-13A2-133A-28A0C02773F0}" dt="2026-09-16T15:45:06.377" v="0"/>
+          <ac:spMkLst>
+            <pc:docMk/>
+            <pc:sldMk cId="0" sldId="261"/>
+            <ac:spMk id="9" creationId="{00000000-0000-0000-0000-000000000000}"/>
+          </ac:spMkLst>
+        </pc:spChg>
+      </pc:sldChg>
+    </pc:docChg>
+  </pc:docChgLst>
+</pc:chgInfo>
 </file>
 
 <file path=ppt/notesMasters/notesMaster1.xml><?xml version="1.0" encoding="utf-8"?>
@@ -136,7 +199,7 @@
       </p:grpSpPr>
       <p:sp>
         <p:nvSpPr>
-          <p:cNvPr id="2" name="Header Placeholder 1"/>
+          <p:cNvPr id="2" name="Верхний колонтитул 1"/>
           <p:cNvSpPr>
             <a:spLocks noGrp="1"/>
           </p:cNvSpPr>
@@ -147,7 +210,7 @@
         <p:spPr>
           <a:xfrm>
             <a:off x="0" y="0"/>
-            <a:ext cx="2971800" cy="458788"/>
+            <a:ext cx="2971800" cy="611188"/>
           </a:xfrm>
           <a:prstGeom prst="rect">
             <a:avLst/>
@@ -167,7 +230,7 @@
       </p:sp>
       <p:sp>
         <p:nvSpPr>
-          <p:cNvPr id="3" name="Date Placeholder 2"/>
+          <p:cNvPr id="3" name="Дата 2"/>
           <p:cNvSpPr>
             <a:spLocks noGrp="1"/>
           </p:cNvSpPr>
@@ -178,7 +241,7 @@
         <p:spPr>
           <a:xfrm>
             <a:off x="3884613" y="0"/>
-            <a:ext cx="2971800" cy="458788"/>
+            <a:ext cx="2971800" cy="611188"/>
           </a:xfrm>
           <a:prstGeom prst="rect">
             <a:avLst/>
@@ -192,9 +255,8 @@
             </a:lvl1pPr>
           </a:lstStyle>
           <a:p>
-            <a:fld id="{5282F153-3F37-0F45-9E97-73ACFA13230C}" type="datetimeFigureOut">
-              <a:rPr lang="en-US"/>
-              <a:t>7/23/19</a:t>
+            <a:fld id="{BC897CCA-3666-48DC-825C-D0258A7771AF}" type="datetimeFigureOut">
+              <a:t>9/16/2026</a:t>
             </a:fld>
             <a:endParaRPr lang="en-US"/>
           </a:p>
@@ -202,7 +264,7 @@
       </p:sp>
       <p:sp>
         <p:nvSpPr>
-          <p:cNvPr id="4" name="Slide Image Placeholder 3"/>
+          <p:cNvPr id="4" name="Образ слайда 3"/>
           <p:cNvSpPr>
             <a:spLocks noGrp="1" noRot="1" noChangeAspect="1"/>
           </p:cNvSpPr>
@@ -212,8 +274,8 @@
         </p:nvSpPr>
         <p:spPr>
           <a:xfrm>
-            <a:off x="685800" y="1143000"/>
-            <a:ext cx="5486400" cy="3086100"/>
+            <a:off x="-228600" y="1524000"/>
+            <a:ext cx="7315200" cy="4114800"/>
           </a:xfrm>
           <a:prstGeom prst="rect">
             <a:avLst/>
@@ -235,7 +297,7 @@
       </p:sp>
       <p:sp>
         <p:nvSpPr>
-          <p:cNvPr id="5" name="Notes Placeholder 4"/>
+          <p:cNvPr id="5" name="Заметки 4"/>
           <p:cNvSpPr>
             <a:spLocks noGrp="1"/>
           </p:cNvSpPr>
@@ -245,8 +307,8 @@
         </p:nvSpPr>
         <p:spPr>
           <a:xfrm>
-            <a:off x="685800" y="4400550"/>
-            <a:ext cx="5486400" cy="3600450"/>
+            <a:off x="685800" y="5867400"/>
+            <a:ext cx="5486400" cy="4800600"/>
           </a:xfrm>
           <a:prstGeom prst="rect">
             <a:avLst/>
@@ -258,43 +320,44 @@
           <a:p>
             <a:pPr lvl="0"/>
             <a:r>
-              <a:rPr lang="en-US"/>
-              <a:t>Click to edit Master text styles</a:t>
+              <a:rPr lang="ru-RU"/>
+              <a:t>Образец текста</a:t>
             </a:r>
           </a:p>
           <a:p>
             <a:pPr lvl="1"/>
             <a:r>
-              <a:rPr lang="en-US"/>
-              <a:t>Second level</a:t>
+              <a:rPr lang="ru-RU"/>
+              <a:t>Второй уровень</a:t>
             </a:r>
           </a:p>
           <a:p>
             <a:pPr lvl="2"/>
             <a:r>
-              <a:rPr lang="en-US"/>
-              <a:t>Third level</a:t>
+              <a:rPr lang="ru-RU"/>
+              <a:t>Третий уровень</a:t>
             </a:r>
           </a:p>
           <a:p>
             <a:pPr lvl="3"/>
             <a:r>
-              <a:rPr lang="en-US"/>
-              <a:t>Fourth level</a:t>
+              <a:rPr lang="ru-RU"/>
+              <a:t>Четвертый уровень</a:t>
             </a:r>
           </a:p>
           <a:p>
             <a:pPr lvl="4"/>
             <a:r>
-              <a:rPr lang="en-US"/>
-              <a:t>Fifth level</a:t>
-            </a:r>
-          </a:p>
-        </p:txBody>
-      </p:sp>
-      <p:sp>
-        <p:nvSpPr>
-          <p:cNvPr id="6" name="Footer Placeholder 5"/>
+              <a:rPr lang="ru-RU"/>
+              <a:t>Пятый уровень</a:t>
+            </a:r>
+            <a:endParaRPr lang="en-US"/>
+          </a:p>
+        </p:txBody>
+      </p:sp>
+      <p:sp>
+        <p:nvSpPr>
+          <p:cNvPr id="6" name="Нижний колонтитул 5"/>
           <p:cNvSpPr>
             <a:spLocks noGrp="1"/>
           </p:cNvSpPr>
@@ -304,8 +367,8 @@
         </p:nvSpPr>
         <p:spPr>
           <a:xfrm>
-            <a:off x="0" y="8685213"/>
-            <a:ext cx="2971800" cy="458787"/>
+            <a:off x="0" y="11580813"/>
+            <a:ext cx="2971800" cy="611187"/>
           </a:xfrm>
           <a:prstGeom prst="rect">
             <a:avLst/>
@@ -325,7 +388,7 @@
       </p:sp>
       <p:sp>
         <p:nvSpPr>
-          <p:cNvPr id="7" name="Slide Number Placeholder 6"/>
+          <p:cNvPr id="7" name="Номер слайда 6"/>
           <p:cNvSpPr>
             <a:spLocks noGrp="1"/>
           </p:cNvSpPr>
@@ -335,8 +398,8 @@
         </p:nvSpPr>
         <p:spPr>
           <a:xfrm>
-            <a:off x="3884613" y="8685213"/>
-            <a:ext cx="2971800" cy="458787"/>
+            <a:off x="3884613" y="11580813"/>
+            <a:ext cx="2971800" cy="611187"/>
           </a:xfrm>
           <a:prstGeom prst="rect">
             <a:avLst/>
@@ -350,8 +413,7 @@
             </a:lvl1pPr>
           </a:lstStyle>
           <a:p>
-            <a:fld id="{CE5E9CC1-C706-0F49-92D6-E571CC5EEA8F}" type="slidenum">
-              <a:rPr lang="en-US"/>
+            <a:fld id="{F6B73446-A0C5-4B9E-948F-E96F5D006659}" type="slidenum">
               <a:t>‹#›</a:t>
             </a:fld>
             <a:endParaRPr lang="en-US"/>
@@ -361,7 +423,7 @@
     </p:spTree>
     <p:extLst>
       <p:ext uri="{BB962C8B-B14F-4D97-AF65-F5344CB8AC3E}">
-        <p14:creationId xmlns:p14="http://schemas.microsoft.com/office/powerpoint/2010/main" val="1024086991"/>
+        <p14:creationId xmlns:p14="http://schemas.microsoft.com/office/powerpoint/2010/main" val="1866804921"/>
       </p:ext>
     </p:extLst>
   </p:cSld>
@@ -505,10 +567,6 @@
           <a:bodyPr/>
           <a:lstStyle/>
           <a:p>
-            <a:r>
-              <a:rPr lang="en-US" dirty="0"/>
-              <a:t/>
-            </a:r>
             <a:endParaRPr lang="en-US" dirty="0"/>
           </a:p>
         </p:txBody>
@@ -593,10 +651,6 @@
           <a:bodyPr/>
           <a:lstStyle/>
           <a:p>
-            <a:r>
-              <a:rPr lang="en-US" dirty="0"/>
-              <a:t/>
-            </a:r>
             <a:endParaRPr lang="en-US" dirty="0"/>
           </a:p>
         </p:txBody>
@@ -681,10 +735,6 @@
           <a:bodyPr/>
           <a:lstStyle/>
           <a:p>
-            <a:r>
-              <a:rPr lang="en-US" dirty="0"/>
-              <a:t/>
-            </a:r>
             <a:endParaRPr lang="en-US" dirty="0"/>
           </a:p>
         </p:txBody>
@@ -769,10 +819,6 @@
           <a:bodyPr/>
           <a:lstStyle/>
           <a:p>
-            <a:r>
-              <a:rPr lang="en-US" dirty="0"/>
-              <a:t/>
-            </a:r>
             <a:endParaRPr lang="en-US" dirty="0"/>
           </a:p>
         </p:txBody>
@@ -794,7 +840,7 @@
           <a:p>
             <a:fld id="{F7021451-1387-4CA6-816F-3879F97B5CBC}" type="slidenum">
               <a:rPr lang="en-US"/>
-              <a:t>4</a:t>
+              <a:t>5</a:t>
             </a:fld>
             <a:endParaRPr lang="en-US"/>
           </a:p>
@@ -857,98 +903,6 @@
           <a:bodyPr/>
           <a:lstStyle/>
           <a:p>
-            <a:r>
-              <a:rPr lang="en-US" dirty="0"/>
-              <a:t/>
-            </a:r>
-            <a:endParaRPr lang="en-US" dirty="0"/>
-          </a:p>
-        </p:txBody>
-      </p:sp>
-      <p:sp>
-        <p:nvSpPr>
-          <p:cNvPr id="4" name="Slide Number Placeholder 3"/>
-          <p:cNvSpPr>
-            <a:spLocks noGrp="1"/>
-          </p:cNvSpPr>
-          <p:nvPr>
-            <p:ph type="sldNum" sz="quarter" idx="10"/>
-          </p:nvPr>
-        </p:nvSpPr>
-        <p:spPr/>
-        <p:txBody>
-          <a:bodyPr/>
-          <a:lstStyle/>
-          <a:p>
-            <a:fld id="{F7021451-1387-4CA6-816F-3879F97B5CBC}" type="slidenum">
-              <a:rPr lang="en-US"/>
-              <a:t>5</a:t>
-            </a:fld>
-            <a:endParaRPr lang="en-US"/>
-          </a:p>
-        </p:txBody>
-      </p:sp>
-    </p:spTree>
-    <p:extLst>
-      <p:ext uri="{BB962C8B-B14F-4D97-AF65-F5344CB8AC3E}">
-        <p14:creationId xmlns:p14="http://schemas.microsoft.com/office/powerpoint/2010/main" val="1024086991"/>
-      </p:ext>
-    </p:extLst>
-  </p:cSld>
-  <p:clrMapOvr>
-    <a:masterClrMapping/>
-  </p:clrMapOvr>
-</p:notes>
-</file>
-
-<file path=ppt/notesSlides/notesSlide6.xml><?xml version="1.0" encoding="utf-8"?>
-<p:notes xmlns:a="http://schemas.openxmlformats.org/drawingml/2006/main" xmlns:r="http://schemas.openxmlformats.org/officeDocument/2006/relationships" xmlns:p="http://schemas.openxmlformats.org/presentationml/2006/main">
-  <p:cSld>
-    <p:spTree>
-      <p:nvGrpSpPr>
-        <p:cNvPr id="1" name=""/>
-        <p:cNvGrpSpPr/>
-        <p:nvPr/>
-      </p:nvGrpSpPr>
-      <p:grpSpPr>
-        <a:xfrm>
-          <a:off x="0" y="0"/>
-          <a:ext cx="0" cy="0"/>
-          <a:chOff x="0" y="0"/>
-          <a:chExt cx="0" cy="0"/>
-        </a:xfrm>
-      </p:grpSpPr>
-      <p:sp>
-        <p:nvSpPr>
-          <p:cNvPr id="2" name="Slide Image Placeholder 1"/>
-          <p:cNvSpPr>
-            <a:spLocks noGrp="1" noRot="1" noChangeAspect="1"/>
-          </p:cNvSpPr>
-          <p:nvPr>
-            <p:ph type="sldImg"/>
-          </p:nvPr>
-        </p:nvSpPr>
-        <p:spPr/>
-      </p:sp>
-      <p:sp>
-        <p:nvSpPr>
-          <p:cNvPr id="3" name="Notes Placeholder 2"/>
-          <p:cNvSpPr>
-            <a:spLocks noGrp="1"/>
-          </p:cNvSpPr>
-          <p:nvPr>
-            <p:ph type="body" idx="1"/>
-          </p:nvPr>
-        </p:nvSpPr>
-        <p:spPr/>
-        <p:txBody>
-          <a:bodyPr/>
-          <a:lstStyle/>
-          <a:p>
-            <a:r>
-              <a:rPr lang="en-US" dirty="0"/>
-              <a:t/>
-            </a:r>
             <a:endParaRPr lang="en-US" dirty="0"/>
           </a:p>
         </p:txBody>
@@ -1027,6 +981,7 @@
         <a:solidFill>
           <a:srgbClr val="F7F7F7"/>
         </a:solidFill>
+        <a:effectLst/>
       </p:bgPr>
     </p:bg>
     <p:spTree>
@@ -1087,7 +1042,7 @@
           <a:bodyPr wrap="square" rtlCol="0" anchor="ctr"/>
           <a:lstStyle/>
           <a:p>
-            <a:pPr indent="0" marL="0">
+            <a:pPr marL="0" indent="0">
               <a:buNone/>
             </a:pPr>
             <a:r>
@@ -1125,7 +1080,7 @@
           </a:prstGeom>
           <a:extLst>
             <a:ext uri="{C572A759-6A51-4108-AA02-DFA0A04FC94B}">
-              <ma14:wrappingTextBoxFlag xmlns:ma14="http://schemas.microsoft.com/office/mac/drawingml/2011/main" val="0"/>
+              <ma14:wrappingTextBoxFlag xmlns="" xmlns:ma14="http://schemas.microsoft.com/office/mac/drawingml/2011/main" val="0"/>
             </a:ext>
           </a:extLst>
         </p:spPr>
@@ -1146,8 +1101,8 @@
           <a:p>
             <a:pPr algn="r"/>
             <a:fld id="{F7021451-1387-4CA6-816F-3879F97B5CBC}" type="slidenum">
-              <a:rPr b="0" lang="en-US"/>
-              <a:t>1002</a:t>
+              <a:rPr lang="en-US" b="0"/>
+              <a:t>‹#›</a:t>
             </a:fld>
             <a:endParaRPr lang="en-US"/>
           </a:p>
@@ -1164,6 +1119,11 @@
 <file path=ppt/slideMasters/slideMaster1.xml><?xml version="1.0" encoding="utf-8"?>
 <p:sldMaster xmlns:a="http://schemas.openxmlformats.org/drawingml/2006/main" xmlns:r="http://schemas.openxmlformats.org/officeDocument/2006/relationships" xmlns:p="http://schemas.openxmlformats.org/presentationml/2006/main">
   <p:cSld>
+    <p:bg>
+      <p:bgRef idx="1001">
+        <a:schemeClr val="bg1"/>
+      </p:bgRef>
+    </p:bg>
     <p:spTree>
       <p:nvGrpSpPr>
         <p:cNvPr id="1" name=""/>
@@ -1198,7 +1158,7 @@
           </a:prstGeom>
           <a:extLst>
             <a:ext uri="{C572A759-6A51-4108-AA02-DFA0A04FC94B}">
-              <ma14:wrappingTextBoxFlag xmlns:ma14="http://schemas.microsoft.com/office/mac/drawingml/2011/main" val="0"/>
+              <ma14:wrappingTextBoxFlag xmlns="" xmlns:ma14="http://schemas.microsoft.com/office/mac/drawingml/2011/main" val="0"/>
             </a:ext>
           </a:extLst>
         </p:spPr>
@@ -1219,8 +1179,8 @@
           <a:p>
             <a:pPr algn="r"/>
             <a:fld id="{F7021451-1387-4CA6-816F-3879F97B5CBC}" type="slidenum">
-              <a:rPr b="0" lang="en-US"/>
-              <a:t>null</a:t>
+              <a:rPr lang="en-US" b="0"/>
+              <a:t>‹#›</a:t>
             </a:fld>
             <a:endParaRPr lang="en-US"/>
           </a:p>
@@ -1525,21 +1485,23 @@
           <a:bodyPr wrap="square" lIns="0" tIns="0" rIns="0" bIns="0" rtlCol="0" anchor="ctr"/>
           <a:lstStyle/>
           <a:p>
-            <a:pPr algn="ctr" indent="0" marL="0">
-              <a:buNone/>
-            </a:pPr>
-            <a:r>
-              <a:rPr lang="en-US" sz="3600" b="1" dirty="0">
+            <a:pPr algn="ctr"/>
+            <a:r>
+              <a:rPr lang="en-US" sz="3600" b="1">
                 <a:solidFill>
                   <a:srgbClr val="202124"/>
                 </a:solidFill>
-                <a:latin typeface="Arial" pitchFamily="34" charset="0"/>
-                <a:ea typeface="Arial" pitchFamily="34" charset="-122"/>
-                <a:cs typeface="Arial" pitchFamily="34" charset="-120"/>
-              </a:rPr>
-              <a:t>СТАНЦИЯ НОЛЬ</a:t>
-            </a:r>
-            <a:endParaRPr lang="en-US" sz="3600" dirty="0"/>
+                <a:latin typeface="Arial"/>
+                <a:cs typeface="Arial"/>
+              </a:rPr>
+              <a:t>Station Z</a:t>
+            </a:r>
+            <a:endParaRPr lang="en-US" sz="3600" b="1">
+              <a:solidFill>
+                <a:srgbClr val="202124"/>
+              </a:solidFill>
+              <a:cs typeface="Arial"/>
+            </a:endParaRPr>
           </a:p>
         </p:txBody>
       </p:sp>
@@ -1564,7 +1526,7 @@
           <a:bodyPr wrap="square" lIns="0" tIns="0" rIns="0" bIns="0" rtlCol="0" anchor="ctr"/>
           <a:lstStyle/>
           <a:p>
-            <a:pPr algn="ctr" indent="0" marL="0">
+            <a:pPr marL="0" indent="0" algn="ctr">
               <a:buNone/>
             </a:pPr>
             <a:r>
@@ -1632,7 +1594,7 @@
           </a:bodyPr>
           <a:lstStyle/>
           <a:p>
-            <a:pPr algn="ctr" indent="0" marL="0">
+            <a:pPr marL="0" indent="0" algn="ctr">
               <a:buNone/>
             </a:pPr>
             <a:r>
@@ -1671,7 +1633,7 @@
           <a:bodyPr wrap="square" lIns="0" tIns="0" rIns="0" bIns="0" rtlCol="0" anchor="ctr"/>
           <a:lstStyle/>
           <a:p>
-            <a:pPr algn="ctr" indent="0" marL="0">
+            <a:pPr marL="0" indent="0" algn="ctr">
               <a:buNone/>
             </a:pPr>
             <a:r>
@@ -1709,7 +1671,7 @@
           </a:prstGeom>
           <a:extLst>
             <a:ext uri="{C572A759-6A51-4108-AA02-DFA0A04FC94B}">
-              <ma14:wrappingTextBoxFlag xmlns:ma14="http://schemas.microsoft.com/office/mac/drawingml/2011/main" val="0"/>
+              <ma14:wrappingTextBoxFlag xmlns="" xmlns:ma14="http://schemas.microsoft.com/office/mac/drawingml/2011/main" val="0"/>
             </a:ext>
           </a:extLst>
         </p:spPr>
@@ -1730,7 +1692,7 @@
           <a:p>
             <a:pPr algn="r"/>
             <a:fld id="{F7021451-1387-4CA6-816F-3879F97B5CBC}" type="slidenum">
-              <a:rPr b="0" lang="en-US"/>
+              <a:rPr lang="en-US" b="0"/>
               <a:t>1</a:t>
             </a:fld>
             <a:endParaRPr lang="en-US"/>
@@ -1783,7 +1745,7 @@
           <a:bodyPr wrap="square" lIns="0" tIns="0" rIns="0" bIns="0" rtlCol="0" anchor="ctr"/>
           <a:lstStyle/>
           <a:p>
-            <a:pPr indent="0" marL="0">
+            <a:pPr marL="0" indent="0">
               <a:buNone/>
             </a:pPr>
             <a:r>
@@ -1822,7 +1784,7 @@
           <a:bodyPr wrap="square" lIns="0" tIns="0" rIns="0" bIns="0" rtlCol="0" anchor="ctr"/>
           <a:lstStyle/>
           <a:p>
-            <a:pPr indent="0" marL="0">
+            <a:pPr marL="0" indent="0">
               <a:buNone/>
             </a:pPr>
             <a:r>
@@ -1890,7 +1852,7 @@
           </a:bodyPr>
           <a:lstStyle/>
           <a:p>
-            <a:pPr algn="ctr" indent="0" marL="0">
+            <a:pPr marL="0" indent="0" algn="ctr">
               <a:buNone/>
             </a:pPr>
             <a:r>
@@ -1958,7 +1920,7 @@
           </a:bodyPr>
           <a:lstStyle/>
           <a:p>
-            <a:pPr algn="ctr" indent="0" marL="0">
+            <a:pPr marL="0" indent="0" algn="ctr">
               <a:buNone/>
             </a:pPr>
             <a:r>
@@ -2026,7 +1988,7 @@
           </a:bodyPr>
           <a:lstStyle/>
           <a:p>
-            <a:pPr algn="ctr" indent="0" marL="0">
+            <a:pPr marL="0" indent="0" algn="ctr">
               <a:buNone/>
             </a:pPr>
             <a:r>
@@ -2065,7 +2027,7 @@
           <a:bodyPr wrap="square" lIns="0" tIns="0" rIns="0" bIns="0" rtlCol="0" anchor="ctr"/>
           <a:lstStyle/>
           <a:p>
-            <a:pPr algn="ctr" indent="0" marL="0">
+            <a:pPr marL="0" indent="0" algn="ctr">
               <a:buNone/>
             </a:pPr>
             <a:r>
@@ -2103,7 +2065,7 @@
           </a:prstGeom>
           <a:extLst>
             <a:ext uri="{C572A759-6A51-4108-AA02-DFA0A04FC94B}">
-              <ma14:wrappingTextBoxFlag xmlns:ma14="http://schemas.microsoft.com/office/mac/drawingml/2011/main" val="0"/>
+              <ma14:wrappingTextBoxFlag xmlns="" xmlns:ma14="http://schemas.microsoft.com/office/mac/drawingml/2011/main" val="0"/>
             </a:ext>
           </a:extLst>
         </p:spPr>
@@ -2124,7 +2086,7 @@
           <a:p>
             <a:pPr algn="r"/>
             <a:fld id="{F7021451-1387-4CA6-816F-3879F97B5CBC}" type="slidenum">
-              <a:rPr b="0" lang="en-US"/>
+              <a:rPr lang="en-US" b="0"/>
               <a:t>2</a:t>
             </a:fld>
             <a:endParaRPr lang="en-US"/>
@@ -2177,7 +2139,7 @@
           <a:bodyPr wrap="square" lIns="0" tIns="0" rIns="0" bIns="0" rtlCol="0" anchor="ctr"/>
           <a:lstStyle/>
           <a:p>
-            <a:pPr indent="0" marL="0">
+            <a:pPr marL="0" indent="0">
               <a:buNone/>
             </a:pPr>
             <a:r>
@@ -2245,7 +2207,7 @@
           </a:bodyPr>
           <a:lstStyle/>
           <a:p>
-            <a:pPr algn="ctr" indent="0" marL="0">
+            <a:pPr marL="0" indent="0" algn="ctr">
               <a:buNone/>
             </a:pPr>
             <a:r>
@@ -2284,7 +2246,7 @@
           <a:bodyPr wrap="square" lIns="0" tIns="0" rIns="0" bIns="0" rtlCol="0" anchor="ctr"/>
           <a:lstStyle/>
           <a:p>
-            <a:pPr algn="ctr" indent="0" marL="0">
+            <a:pPr marL="0" indent="0" algn="ctr">
               <a:buNone/>
             </a:pPr>
             <a:r>
@@ -2352,7 +2314,7 @@
           </a:bodyPr>
           <a:lstStyle/>
           <a:p>
-            <a:pPr algn="ctr" indent="0" marL="0">
+            <a:pPr marL="0" indent="0" algn="ctr">
               <a:buNone/>
             </a:pPr>
             <a:r>
@@ -2391,7 +2353,7 @@
           <a:bodyPr wrap="square" lIns="0" tIns="0" rIns="0" bIns="0" rtlCol="0" anchor="ctr"/>
           <a:lstStyle/>
           <a:p>
-            <a:pPr algn="ctr" indent="0" marL="0">
+            <a:pPr marL="0" indent="0" algn="ctr">
               <a:buNone/>
             </a:pPr>
             <a:r>
@@ -2459,7 +2421,7 @@
           </a:bodyPr>
           <a:lstStyle/>
           <a:p>
-            <a:pPr algn="ctr" indent="0" marL="0">
+            <a:pPr marL="0" indent="0" algn="ctr">
               <a:buNone/>
             </a:pPr>
             <a:r>
@@ -2498,7 +2460,7 @@
           <a:bodyPr wrap="square" lIns="0" tIns="0" rIns="0" bIns="0" rtlCol="0" anchor="ctr"/>
           <a:lstStyle/>
           <a:p>
-            <a:pPr algn="ctr" indent="0" marL="0">
+            <a:pPr marL="0" indent="0" algn="ctr">
               <a:buNone/>
             </a:pPr>
             <a:r>
@@ -2566,7 +2528,7 @@
           </a:bodyPr>
           <a:lstStyle/>
           <a:p>
-            <a:pPr algn="ctr" indent="0" marL="0">
+            <a:pPr marL="0" indent="0" algn="ctr">
               <a:buNone/>
             </a:pPr>
             <a:r>
@@ -2605,7 +2567,7 @@
           <a:bodyPr wrap="square" lIns="0" tIns="0" rIns="0" bIns="0" rtlCol="0" anchor="ctr"/>
           <a:lstStyle/>
           <a:p>
-            <a:pPr algn="ctr" indent="0" marL="0">
+            <a:pPr marL="0" indent="0" algn="ctr">
               <a:buNone/>
             </a:pPr>
             <a:r>
@@ -2673,7 +2635,7 @@
           </a:bodyPr>
           <a:lstStyle/>
           <a:p>
-            <a:pPr algn="ctr" indent="0" marL="0">
+            <a:pPr marL="0" indent="0" algn="ctr">
               <a:buNone/>
             </a:pPr>
             <a:r>
@@ -2712,7 +2674,7 @@
           <a:bodyPr wrap="square" lIns="0" tIns="0" rIns="0" bIns="0" rtlCol="0" anchor="ctr"/>
           <a:lstStyle/>
           <a:p>
-            <a:pPr algn="ctr" indent="0" marL="0">
+            <a:pPr marL="0" indent="0" algn="ctr">
               <a:buNone/>
             </a:pPr>
             <a:r>
@@ -2750,7 +2712,7 @@
           </a:prstGeom>
           <a:extLst>
             <a:ext uri="{C572A759-6A51-4108-AA02-DFA0A04FC94B}">
-              <ma14:wrappingTextBoxFlag xmlns:ma14="http://schemas.microsoft.com/office/mac/drawingml/2011/main" val="0"/>
+              <ma14:wrappingTextBoxFlag xmlns="" xmlns:ma14="http://schemas.microsoft.com/office/mac/drawingml/2011/main" val="0"/>
             </a:ext>
           </a:extLst>
         </p:spPr>
@@ -2771,7 +2733,7 @@
           <a:p>
             <a:pPr algn="r"/>
             <a:fld id="{F7021451-1387-4CA6-816F-3879F97B5CBC}" type="slidenum">
-              <a:rPr b="0" lang="en-US"/>
+              <a:rPr lang="en-US" b="0"/>
               <a:t>3</a:t>
             </a:fld>
             <a:endParaRPr lang="en-US"/>
@@ -2787,878 +2749,6 @@
 </file>
 
 <file path=ppt/slides/slide4.xml><?xml version="1.0" encoding="utf-8"?>
-<p:sld xmlns:a="http://schemas.openxmlformats.org/drawingml/2006/main" xmlns:r="http://schemas.openxmlformats.org/officeDocument/2006/relationships" xmlns:p="http://schemas.openxmlformats.org/presentationml/2006/main">
-  <p:cSld name="Slide 4">
-    <p:spTree>
-      <p:nvGrpSpPr>
-        <p:cNvPr id="1" name=""/>
-        <p:cNvGrpSpPr/>
-        <p:nvPr/>
-      </p:nvGrpSpPr>
-      <p:grpSpPr>
-        <a:xfrm>
-          <a:off x="0" y="0"/>
-          <a:ext cx="0" cy="0"/>
-          <a:chOff x="0" y="0"/>
-          <a:chExt cx="0" cy="0"/>
-        </a:xfrm>
-      </p:grpSpPr>
-      <p:sp>
-        <p:nvSpPr>
-          <p:cNvPr id="2" name="Text 0"/>
-          <p:cNvSpPr/>
-          <p:nvPr/>
-        </p:nvSpPr>
-        <p:spPr>
-          <a:xfrm>
-            <a:off x="685800" y="502920"/>
-            <a:ext cx="10698480" cy="502920"/>
-          </a:xfrm>
-          <a:prstGeom prst="rect">
-            <a:avLst/>
-          </a:prstGeom>
-          <a:noFill/>
-          <a:ln/>
-        </p:spPr>
-        <p:txBody>
-          <a:bodyPr wrap="square" lIns="0" tIns="0" rIns="0" bIns="0" rtlCol="0" anchor="ctr"/>
-          <a:lstStyle/>
-          <a:p>
-            <a:pPr indent="0" marL="0">
-              <a:buNone/>
-            </a:pPr>
-            <a:r>
-              <a:rPr lang="en-US" sz="2800" b="1" dirty="0">
-                <a:solidFill>
-                  <a:srgbClr val="202124"/>
-                </a:solidFill>
-                <a:latin typeface="Arial" pitchFamily="34" charset="0"/>
-                <a:ea typeface="Arial" pitchFamily="34" charset="-122"/>
-                <a:cs typeface="Arial" pitchFamily="34" charset="-120"/>
-              </a:rPr>
-              <a:t>Мир и прогрессия</a:t>
-            </a:r>
-            <a:endParaRPr lang="en-US" sz="2800" dirty="0"/>
-          </a:p>
-        </p:txBody>
-      </p:sp>
-      <p:sp>
-        <p:nvSpPr>
-          <p:cNvPr id="3" name="Text 1"/>
-          <p:cNvSpPr/>
-          <p:nvPr/>
-        </p:nvSpPr>
-        <p:spPr>
-          <a:xfrm>
-            <a:off x="704088" y="1024128"/>
-            <a:ext cx="10424160" cy="310896"/>
-          </a:xfrm>
-          <a:prstGeom prst="rect">
-            <a:avLst/>
-          </a:prstGeom>
-          <a:noFill/>
-          <a:ln/>
-        </p:spPr>
-        <p:txBody>
-          <a:bodyPr wrap="square" lIns="0" tIns="0" rIns="0" bIns="0" rtlCol="0" anchor="ctr"/>
-          <a:lstStyle/>
-          <a:p>
-            <a:pPr indent="0" marL="0">
-              <a:buNone/>
-            </a:pPr>
-            <a:r>
-              <a:rPr lang="en-US" sz="1300" dirty="0">
-                <a:solidFill>
-                  <a:srgbClr val="5F6368"/>
-                </a:solidFill>
-                <a:latin typeface="Arial" pitchFamily="34" charset="0"/>
-                <a:ea typeface="Arial" pitchFamily="34" charset="-122"/>
-                <a:cs typeface="Arial" pitchFamily="34" charset="-120"/>
-              </a:rPr>
-              <a:t>15 комнат и несколько закрытых проходов</a:t>
-            </a:r>
-            <a:endParaRPr lang="en-US" sz="1300" dirty="0"/>
-          </a:p>
-        </p:txBody>
-      </p:sp>
-      <p:sp>
-        <p:nvSpPr>
-          <p:cNvPr id="4" name="Shape 2"/>
-          <p:cNvSpPr/>
-          <p:nvPr/>
-        </p:nvSpPr>
-        <p:spPr>
-          <a:xfrm>
-            <a:off x="731520" y="2286000"/>
-            <a:ext cx="1325880" cy="731520"/>
-          </a:xfrm>
-          <a:prstGeom prst="roundRect">
-            <a:avLst>
-              <a:gd name="adj" fmla="val 5000"/>
-            </a:avLst>
-          </a:prstGeom>
-          <a:solidFill>
-            <a:srgbClr val="FFFFFF"/>
-          </a:solidFill>
-          <a:ln w="15240">
-            <a:solidFill>
-              <a:srgbClr val="DADCE0"/>
-            </a:solidFill>
-            <a:prstDash val="solid"/>
-          </a:ln>
-        </p:spPr>
-      </p:sp>
-      <p:sp>
-        <p:nvSpPr>
-          <p:cNvPr id="5" name="Text 3"/>
-          <p:cNvSpPr/>
-          <p:nvPr/>
-        </p:nvSpPr>
-        <p:spPr>
-          <a:xfrm>
-            <a:off x="896112" y="2423160"/>
-            <a:ext cx="996696" cy="457200"/>
-          </a:xfrm>
-          <a:prstGeom prst="rect">
-            <a:avLst/>
-          </a:prstGeom>
-          <a:noFill/>
-          <a:ln/>
-        </p:spPr>
-        <p:txBody>
-          <a:bodyPr wrap="square" lIns="254" tIns="254" rIns="254" bIns="254" rtlCol="0" anchor="ctr">
-            <a:normAutofit/>
-          </a:bodyPr>
-          <a:lstStyle/>
-          <a:p>
-            <a:pPr algn="ctr" indent="0" marL="0">
-              <a:buNone/>
-            </a:pPr>
-            <a:r>
-              <a:rPr lang="en-US" sz="1300" dirty="0">
-                <a:solidFill>
-                  <a:srgbClr val="202124"/>
-                </a:solidFill>
-                <a:latin typeface="Arial" pitchFamily="34" charset="0"/>
-                <a:ea typeface="Arial" pitchFamily="34" charset="-122"/>
-                <a:cs typeface="Arial" pitchFamily="34" charset="-120"/>
-              </a:rPr>
-              <a:t>Камера</a:t>
-            </a:r>
-            <a:endParaRPr lang="en-US" sz="1300" dirty="0"/>
-          </a:p>
-        </p:txBody>
-      </p:sp>
-      <p:sp>
-        <p:nvSpPr>
-          <p:cNvPr id="6" name="Shape 4"/>
-          <p:cNvSpPr/>
-          <p:nvPr/>
-        </p:nvSpPr>
-        <p:spPr>
-          <a:xfrm>
-            <a:off x="2377440" y="2286000"/>
-            <a:ext cx="1325880" cy="731520"/>
-          </a:xfrm>
-          <a:prstGeom prst="roundRect">
-            <a:avLst>
-              <a:gd name="adj" fmla="val 5000"/>
-            </a:avLst>
-          </a:prstGeom>
-          <a:solidFill>
-            <a:srgbClr val="FFFFFF"/>
-          </a:solidFill>
-          <a:ln w="15240">
-            <a:solidFill>
-              <a:srgbClr val="DADCE0"/>
-            </a:solidFill>
-            <a:prstDash val="solid"/>
-          </a:ln>
-        </p:spPr>
-      </p:sp>
-      <p:sp>
-        <p:nvSpPr>
-          <p:cNvPr id="7" name="Text 5"/>
-          <p:cNvSpPr/>
-          <p:nvPr/>
-        </p:nvSpPr>
-        <p:spPr>
-          <a:xfrm>
-            <a:off x="2542032" y="2423160"/>
-            <a:ext cx="996696" cy="457200"/>
-          </a:xfrm>
-          <a:prstGeom prst="rect">
-            <a:avLst/>
-          </a:prstGeom>
-          <a:noFill/>
-          <a:ln/>
-        </p:spPr>
-        <p:txBody>
-          <a:bodyPr wrap="square" lIns="254" tIns="254" rIns="254" bIns="254" rtlCol="0" anchor="ctr">
-            <a:normAutofit/>
-          </a:bodyPr>
-          <a:lstStyle/>
-          <a:p>
-            <a:pPr algn="ctr" indent="0" marL="0">
-              <a:buNone/>
-            </a:pPr>
-            <a:r>
-              <a:rPr lang="en-US" sz="1300" dirty="0">
-                <a:solidFill>
-                  <a:srgbClr val="202124"/>
-                </a:solidFill>
-                <a:latin typeface="Arial" pitchFamily="34" charset="0"/>
-                <a:ea typeface="Arial" pitchFamily="34" charset="-122"/>
-                <a:cs typeface="Arial" pitchFamily="34" charset="-120"/>
-              </a:rPr>
-              <a:t>Склад</a:t>
-            </a:r>
-            <a:endParaRPr lang="en-US" sz="1300" dirty="0"/>
-          </a:p>
-        </p:txBody>
-      </p:sp>
-      <p:sp>
-        <p:nvSpPr>
-          <p:cNvPr id="8" name="Shape 6"/>
-          <p:cNvSpPr/>
-          <p:nvPr/>
-        </p:nvSpPr>
-        <p:spPr>
-          <a:xfrm>
-            <a:off x="4023360" y="2286000"/>
-            <a:ext cx="1325880" cy="731520"/>
-          </a:xfrm>
-          <a:prstGeom prst="roundRect">
-            <a:avLst>
-              <a:gd name="adj" fmla="val 5000"/>
-            </a:avLst>
-          </a:prstGeom>
-          <a:solidFill>
-            <a:srgbClr val="FFFFFF"/>
-          </a:solidFill>
-          <a:ln w="15240">
-            <a:solidFill>
-              <a:srgbClr val="DADCE0"/>
-            </a:solidFill>
-            <a:prstDash val="solid"/>
-          </a:ln>
-        </p:spPr>
-      </p:sp>
-      <p:sp>
-        <p:nvSpPr>
-          <p:cNvPr id="9" name="Text 7"/>
-          <p:cNvSpPr/>
-          <p:nvPr/>
-        </p:nvSpPr>
-        <p:spPr>
-          <a:xfrm>
-            <a:off x="4187952" y="2423160"/>
-            <a:ext cx="996696" cy="457200"/>
-          </a:xfrm>
-          <a:prstGeom prst="rect">
-            <a:avLst/>
-          </a:prstGeom>
-          <a:noFill/>
-          <a:ln/>
-        </p:spPr>
-        <p:txBody>
-          <a:bodyPr wrap="square" lIns="254" tIns="254" rIns="254" bIns="254" rtlCol="0" anchor="ctr">
-            <a:normAutofit/>
-          </a:bodyPr>
-          <a:lstStyle/>
-          <a:p>
-            <a:pPr algn="ctr" indent="0" marL="0">
-              <a:buNone/>
-            </a:pPr>
-            <a:r>
-              <a:rPr lang="en-US" sz="1300" dirty="0">
-                <a:solidFill>
-                  <a:srgbClr val="202124"/>
-                </a:solidFill>
-                <a:latin typeface="Arial" pitchFamily="34" charset="0"/>
-                <a:ea typeface="Arial" pitchFamily="34" charset="-122"/>
-                <a:cs typeface="Arial" pitchFamily="34" charset="-120"/>
-              </a:rPr>
-              <a:t>Коридор</a:t>
-            </a:r>
-            <a:endParaRPr lang="en-US" sz="1300" dirty="0"/>
-          </a:p>
-        </p:txBody>
-      </p:sp>
-      <p:sp>
-        <p:nvSpPr>
-          <p:cNvPr id="10" name="Shape 8"/>
-          <p:cNvSpPr/>
-          <p:nvPr/>
-        </p:nvSpPr>
-        <p:spPr>
-          <a:xfrm>
-            <a:off x="5669280" y="1463040"/>
-            <a:ext cx="1325880" cy="731520"/>
-          </a:xfrm>
-          <a:prstGeom prst="roundRect">
-            <a:avLst>
-              <a:gd name="adj" fmla="val 5000"/>
-            </a:avLst>
-          </a:prstGeom>
-          <a:solidFill>
-            <a:srgbClr val="FFFFFF"/>
-          </a:solidFill>
-          <a:ln w="15240">
-            <a:solidFill>
-              <a:srgbClr val="DADCE0"/>
-            </a:solidFill>
-            <a:prstDash val="solid"/>
-          </a:ln>
-        </p:spPr>
-      </p:sp>
-      <p:sp>
-        <p:nvSpPr>
-          <p:cNvPr id="11" name="Text 9"/>
-          <p:cNvSpPr/>
-          <p:nvPr/>
-        </p:nvSpPr>
-        <p:spPr>
-          <a:xfrm>
-            <a:off x="5833872" y="1600200"/>
-            <a:ext cx="996696" cy="457200"/>
-          </a:xfrm>
-          <a:prstGeom prst="rect">
-            <a:avLst/>
-          </a:prstGeom>
-          <a:noFill/>
-          <a:ln/>
-        </p:spPr>
-        <p:txBody>
-          <a:bodyPr wrap="square" lIns="254" tIns="254" rIns="254" bIns="254" rtlCol="0" anchor="ctr">
-            <a:normAutofit/>
-          </a:bodyPr>
-          <a:lstStyle/>
-          <a:p>
-            <a:pPr algn="ctr" indent="0" marL="0">
-              <a:buNone/>
-            </a:pPr>
-            <a:r>
-              <a:rPr lang="en-US" sz="1300" dirty="0">
-                <a:solidFill>
-                  <a:srgbClr val="202124"/>
-                </a:solidFill>
-                <a:latin typeface="Arial" pitchFamily="34" charset="0"/>
-                <a:ea typeface="Arial" pitchFamily="34" charset="-122"/>
-                <a:cs typeface="Arial" pitchFamily="34" charset="-120"/>
-              </a:rPr>
-              <a:t>Лаборатория</a:t>
-            </a:r>
-            <a:endParaRPr lang="en-US" sz="1300" dirty="0"/>
-          </a:p>
-        </p:txBody>
-      </p:sp>
-      <p:sp>
-        <p:nvSpPr>
-          <p:cNvPr id="12" name="Shape 10"/>
-          <p:cNvSpPr/>
-          <p:nvPr/>
-        </p:nvSpPr>
-        <p:spPr>
-          <a:xfrm>
-            <a:off x="5669280" y="3108960"/>
-            <a:ext cx="1325880" cy="731520"/>
-          </a:xfrm>
-          <a:prstGeom prst="roundRect">
-            <a:avLst>
-              <a:gd name="adj" fmla="val 5000"/>
-            </a:avLst>
-          </a:prstGeom>
-          <a:solidFill>
-            <a:srgbClr val="FFFFFF"/>
-          </a:solidFill>
-          <a:ln w="15240">
-            <a:solidFill>
-              <a:srgbClr val="DADCE0"/>
-            </a:solidFill>
-            <a:prstDash val="solid"/>
-          </a:ln>
-        </p:spPr>
-      </p:sp>
-      <p:sp>
-        <p:nvSpPr>
-          <p:cNvPr id="13" name="Text 11"/>
-          <p:cNvSpPr/>
-          <p:nvPr/>
-        </p:nvSpPr>
-        <p:spPr>
-          <a:xfrm>
-            <a:off x="5833872" y="3246120"/>
-            <a:ext cx="996696" cy="457200"/>
-          </a:xfrm>
-          <a:prstGeom prst="rect">
-            <a:avLst/>
-          </a:prstGeom>
-          <a:noFill/>
-          <a:ln/>
-        </p:spPr>
-        <p:txBody>
-          <a:bodyPr wrap="square" lIns="254" tIns="254" rIns="254" bIns="254" rtlCol="0" anchor="ctr">
-            <a:normAutofit/>
-          </a:bodyPr>
-          <a:lstStyle/>
-          <a:p>
-            <a:pPr algn="ctr" indent="0" marL="0">
-              <a:buNone/>
-            </a:pPr>
-            <a:r>
-              <a:rPr lang="en-US" sz="1300" dirty="0">
-                <a:solidFill>
-                  <a:srgbClr val="202124"/>
-                </a:solidFill>
-                <a:latin typeface="Arial" pitchFamily="34" charset="0"/>
-                <a:ea typeface="Arial" pitchFamily="34" charset="-122"/>
-                <a:cs typeface="Arial" pitchFamily="34" charset="-120"/>
-              </a:rPr>
-              <a:t>Реактор</a:t>
-            </a:r>
-            <a:endParaRPr lang="en-US" sz="1300" dirty="0"/>
-          </a:p>
-        </p:txBody>
-      </p:sp>
-      <p:sp>
-        <p:nvSpPr>
-          <p:cNvPr id="14" name="Shape 12"/>
-          <p:cNvSpPr/>
-          <p:nvPr/>
-        </p:nvSpPr>
-        <p:spPr>
-          <a:xfrm>
-            <a:off x="7315200" y="2286000"/>
-            <a:ext cx="1325880" cy="731520"/>
-          </a:xfrm>
-          <a:prstGeom prst="roundRect">
-            <a:avLst>
-              <a:gd name="adj" fmla="val 5000"/>
-            </a:avLst>
-          </a:prstGeom>
-          <a:solidFill>
-            <a:srgbClr val="FFFFFF"/>
-          </a:solidFill>
-          <a:ln w="15240">
-            <a:solidFill>
-              <a:srgbClr val="DADCE0"/>
-            </a:solidFill>
-            <a:prstDash val="solid"/>
-          </a:ln>
-        </p:spPr>
-      </p:sp>
-      <p:sp>
-        <p:nvSpPr>
-          <p:cNvPr id="15" name="Text 13"/>
-          <p:cNvSpPr/>
-          <p:nvPr/>
-        </p:nvSpPr>
-        <p:spPr>
-          <a:xfrm>
-            <a:off x="7479792" y="2423160"/>
-            <a:ext cx="996696" cy="457200"/>
-          </a:xfrm>
-          <a:prstGeom prst="rect">
-            <a:avLst/>
-          </a:prstGeom>
-          <a:noFill/>
-          <a:ln/>
-        </p:spPr>
-        <p:txBody>
-          <a:bodyPr wrap="square" lIns="254" tIns="254" rIns="254" bIns="254" rtlCol="0" anchor="ctr">
-            <a:normAutofit/>
-          </a:bodyPr>
-          <a:lstStyle/>
-          <a:p>
-            <a:pPr algn="ctr" indent="0" marL="0">
-              <a:buNone/>
-            </a:pPr>
-            <a:r>
-              <a:rPr lang="en-US" sz="1300" dirty="0">
-                <a:solidFill>
-                  <a:srgbClr val="202124"/>
-                </a:solidFill>
-                <a:latin typeface="Arial" pitchFamily="34" charset="0"/>
-                <a:ea typeface="Arial" pitchFamily="34" charset="-122"/>
-                <a:cs typeface="Arial" pitchFamily="34" charset="-120"/>
-              </a:rPr>
-              <a:t>Охрана</a:t>
-            </a:r>
-            <a:endParaRPr lang="en-US" sz="1300" dirty="0"/>
-          </a:p>
-        </p:txBody>
-      </p:sp>
-      <p:sp>
-        <p:nvSpPr>
-          <p:cNvPr id="16" name="Shape 14"/>
-          <p:cNvSpPr/>
-          <p:nvPr/>
-        </p:nvSpPr>
-        <p:spPr>
-          <a:xfrm>
-            <a:off x="8961120" y="2286000"/>
-            <a:ext cx="1325880" cy="731520"/>
-          </a:xfrm>
-          <a:prstGeom prst="roundRect">
-            <a:avLst>
-              <a:gd name="adj" fmla="val 5000"/>
-            </a:avLst>
-          </a:prstGeom>
-          <a:solidFill>
-            <a:srgbClr val="FFFFFF"/>
-          </a:solidFill>
-          <a:ln w="15240">
-            <a:solidFill>
-              <a:srgbClr val="DADCE0"/>
-            </a:solidFill>
-            <a:prstDash val="solid"/>
-          </a:ln>
-        </p:spPr>
-      </p:sp>
-      <p:sp>
-        <p:nvSpPr>
-          <p:cNvPr id="17" name="Text 15"/>
-          <p:cNvSpPr/>
-          <p:nvPr/>
-        </p:nvSpPr>
-        <p:spPr>
-          <a:xfrm>
-            <a:off x="9125712" y="2423160"/>
-            <a:ext cx="996696" cy="457200"/>
-          </a:xfrm>
-          <a:prstGeom prst="rect">
-            <a:avLst/>
-          </a:prstGeom>
-          <a:noFill/>
-          <a:ln/>
-        </p:spPr>
-        <p:txBody>
-          <a:bodyPr wrap="square" lIns="254" tIns="254" rIns="254" bIns="254" rtlCol="0" anchor="ctr">
-            <a:normAutofit/>
-          </a:bodyPr>
-          <a:lstStyle/>
-          <a:p>
-            <a:pPr algn="ctr" indent="0" marL="0">
-              <a:buNone/>
-            </a:pPr>
-            <a:r>
-              <a:rPr lang="en-US" sz="1300" dirty="0">
-                <a:solidFill>
-                  <a:srgbClr val="202124"/>
-                </a:solidFill>
-                <a:latin typeface="Arial" pitchFamily="34" charset="0"/>
-                <a:ea typeface="Arial" pitchFamily="34" charset="-122"/>
-                <a:cs typeface="Arial" pitchFamily="34" charset="-120"/>
-              </a:rPr>
-              <a:t>Командный центр</a:t>
-            </a:r>
-            <a:endParaRPr lang="en-US" sz="1300" dirty="0"/>
-          </a:p>
-        </p:txBody>
-      </p:sp>
-      <p:sp>
-        <p:nvSpPr>
-          <p:cNvPr id="18" name="Shape 16"/>
-          <p:cNvSpPr/>
-          <p:nvPr/>
-        </p:nvSpPr>
-        <p:spPr>
-          <a:xfrm>
-            <a:off x="10332720" y="2286000"/>
-            <a:ext cx="1325880" cy="731520"/>
-          </a:xfrm>
-          <a:prstGeom prst="roundRect">
-            <a:avLst>
-              <a:gd name="adj" fmla="val 5000"/>
-            </a:avLst>
-          </a:prstGeom>
-          <a:solidFill>
-            <a:srgbClr val="FFFFFF"/>
-          </a:solidFill>
-          <a:ln w="15240">
-            <a:solidFill>
-              <a:srgbClr val="DADCE0"/>
-            </a:solidFill>
-            <a:prstDash val="solid"/>
-          </a:ln>
-        </p:spPr>
-      </p:sp>
-      <p:sp>
-        <p:nvSpPr>
-          <p:cNvPr id="19" name="Text 17"/>
-          <p:cNvSpPr/>
-          <p:nvPr/>
-        </p:nvSpPr>
-        <p:spPr>
-          <a:xfrm>
-            <a:off x="10497312" y="2423160"/>
-            <a:ext cx="996696" cy="457200"/>
-          </a:xfrm>
-          <a:prstGeom prst="rect">
-            <a:avLst/>
-          </a:prstGeom>
-          <a:noFill/>
-          <a:ln/>
-        </p:spPr>
-        <p:txBody>
-          <a:bodyPr wrap="square" lIns="254" tIns="254" rIns="254" bIns="254" rtlCol="0" anchor="ctr">
-            <a:normAutofit/>
-          </a:bodyPr>
-          <a:lstStyle/>
-          <a:p>
-            <a:pPr algn="ctr" indent="0" marL="0">
-              <a:buNone/>
-            </a:pPr>
-            <a:r>
-              <a:rPr lang="en-US" sz="1300" dirty="0">
-                <a:solidFill>
-                  <a:srgbClr val="202124"/>
-                </a:solidFill>
-                <a:latin typeface="Arial" pitchFamily="34" charset="0"/>
-                <a:ea typeface="Arial" pitchFamily="34" charset="-122"/>
-                <a:cs typeface="Arial" pitchFamily="34" charset="-120"/>
-              </a:rPr>
-              <a:t>Ядро</a:t>
-            </a:r>
-            <a:endParaRPr lang="en-US" sz="1300" dirty="0"/>
-          </a:p>
-        </p:txBody>
-      </p:sp>
-      <p:sp>
-        <p:nvSpPr>
-          <p:cNvPr id="20" name="Shape 18"/>
-          <p:cNvSpPr/>
-          <p:nvPr/>
-        </p:nvSpPr>
-        <p:spPr>
-          <a:xfrm>
-            <a:off x="2057400" y="2651760"/>
-            <a:ext cx="320040" cy="0"/>
-          </a:xfrm>
-          <a:prstGeom prst="line">
-            <a:avLst/>
-          </a:prstGeom>
-          <a:noFill/>
-          <a:ln w="16510">
-            <a:solidFill>
-              <a:srgbClr val="9AA0A6"/>
-            </a:solidFill>
-            <a:prstDash val="solid"/>
-          </a:ln>
-        </p:spPr>
-      </p:sp>
-      <p:sp>
-        <p:nvSpPr>
-          <p:cNvPr id="21" name="Shape 19"/>
-          <p:cNvSpPr/>
-          <p:nvPr/>
-        </p:nvSpPr>
-        <p:spPr>
-          <a:xfrm>
-            <a:off x="3703320" y="2651760"/>
-            <a:ext cx="320040" cy="0"/>
-          </a:xfrm>
-          <a:prstGeom prst="line">
-            <a:avLst/>
-          </a:prstGeom>
-          <a:noFill/>
-          <a:ln w="16510">
-            <a:solidFill>
-              <a:srgbClr val="9AA0A6"/>
-            </a:solidFill>
-            <a:prstDash val="solid"/>
-          </a:ln>
-        </p:spPr>
-      </p:sp>
-      <p:sp>
-        <p:nvSpPr>
-          <p:cNvPr id="22" name="Shape 20"/>
-          <p:cNvSpPr/>
-          <p:nvPr/>
-        </p:nvSpPr>
-        <p:spPr>
-          <a:xfrm>
-            <a:off x="5349240" y="2651760"/>
-            <a:ext cx="320040" cy="-822960"/>
-          </a:xfrm>
-          <a:prstGeom prst="line">
-            <a:avLst/>
-          </a:prstGeom>
-          <a:noFill/>
-          <a:ln w="16510">
-            <a:solidFill>
-              <a:srgbClr val="9AA0A6"/>
-            </a:solidFill>
-            <a:prstDash val="solid"/>
-          </a:ln>
-        </p:spPr>
-      </p:sp>
-      <p:sp>
-        <p:nvSpPr>
-          <p:cNvPr id="23" name="Shape 21"/>
-          <p:cNvSpPr/>
-          <p:nvPr/>
-        </p:nvSpPr>
-        <p:spPr>
-          <a:xfrm>
-            <a:off x="6995160" y="3474720"/>
-            <a:ext cx="320040" cy="-822960"/>
-          </a:xfrm>
-          <a:prstGeom prst="line">
-            <a:avLst/>
-          </a:prstGeom>
-          <a:noFill/>
-          <a:ln w="16510">
-            <a:solidFill>
-              <a:srgbClr val="9AA0A6"/>
-            </a:solidFill>
-            <a:prstDash val="solid"/>
-          </a:ln>
-        </p:spPr>
-      </p:sp>
-      <p:sp>
-        <p:nvSpPr>
-          <p:cNvPr id="24" name="Shape 22"/>
-          <p:cNvSpPr/>
-          <p:nvPr/>
-        </p:nvSpPr>
-        <p:spPr>
-          <a:xfrm>
-            <a:off x="8641080" y="2651760"/>
-            <a:ext cx="320040" cy="0"/>
-          </a:xfrm>
-          <a:prstGeom prst="line">
-            <a:avLst/>
-          </a:prstGeom>
-          <a:noFill/>
-          <a:ln w="16510">
-            <a:solidFill>
-              <a:srgbClr val="9AA0A6"/>
-            </a:solidFill>
-            <a:prstDash val="solid"/>
-          </a:ln>
-        </p:spPr>
-      </p:sp>
-      <p:sp>
-        <p:nvSpPr>
-          <p:cNvPr id="25" name="Shape 23"/>
-          <p:cNvSpPr/>
-          <p:nvPr/>
-        </p:nvSpPr>
-        <p:spPr>
-          <a:xfrm>
-            <a:off x="10287000" y="2651760"/>
-            <a:ext cx="274320" cy="0"/>
-          </a:xfrm>
-          <a:prstGeom prst="line">
-            <a:avLst/>
-          </a:prstGeom>
-          <a:noFill/>
-          <a:ln w="16510">
-            <a:solidFill>
-              <a:srgbClr val="9AA0A6"/>
-            </a:solidFill>
-            <a:prstDash val="solid"/>
-          </a:ln>
-        </p:spPr>
-      </p:sp>
-      <p:sp>
-        <p:nvSpPr>
-          <p:cNvPr id="26" name="Text 24"/>
-          <p:cNvSpPr/>
-          <p:nvPr/>
-        </p:nvSpPr>
-        <p:spPr>
-          <a:xfrm>
-            <a:off x="868680" y="4800600"/>
-            <a:ext cx="10424160" cy="594360"/>
-          </a:xfrm>
-          <a:prstGeom prst="rect">
-            <a:avLst/>
-          </a:prstGeom>
-          <a:noFill/>
-          <a:ln/>
-        </p:spPr>
-        <p:txBody>
-          <a:bodyPr wrap="square" lIns="0" tIns="0" rIns="0" bIns="0" rtlCol="0" anchor="ctr"/>
-          <a:lstStyle/>
-          <a:p>
-            <a:pPr algn="ctr" indent="0" marL="0">
-              <a:buNone/>
-            </a:pPr>
-            <a:r>
-              <a:rPr lang="en-US" sz="1700" dirty="0">
-                <a:solidFill>
-                  <a:srgbClr val="3C4043"/>
-                </a:solidFill>
-                <a:latin typeface="Arial" pitchFamily="34" charset="0"/>
-                <a:ea typeface="Arial" pitchFamily="34" charset="-122"/>
-                <a:cs typeface="Arial" pitchFamily="34" charset="-120"/>
-              </a:rPr>
-              <a:t>Ключевые шаги: предохранитель → реактор → карта → токен → ключ лифта → финальный бой</a:t>
-            </a:r>
-            <a:endParaRPr lang="en-US" sz="1700" dirty="0"/>
-          </a:p>
-        </p:txBody>
-      </p:sp>
-      <p:sp>
-        <p:nvSpPr>
-          <p:cNvPr id="25" name="Slide Number Placeholder 0"/>
-          <p:cNvSpPr>
-            <a:spLocks noGrp="1"/>
-          </p:cNvSpPr>
-          <p:nvPr>
-            <p:ph type="sldNum" sz="quarter" idx="4294967295"/>
-          </p:nvPr>
-        </p:nvSpPr>
-        <p:spPr>
-          <a:xfrm>
-            <a:off x="11064240" y="6455664"/>
-            <a:ext cx="457200" cy="182880"/>
-          </a:xfrm>
-          <a:prstGeom prst="rect">
-            <a:avLst/>
-          </a:prstGeom>
-          <a:extLst>
-            <a:ext uri="{C572A759-6A51-4108-AA02-DFA0A04FC94B}">
-              <ma14:wrappingTextBoxFlag xmlns:ma14="http://schemas.microsoft.com/office/mac/drawingml/2011/main" val="0"/>
-            </a:ext>
-          </a:extLst>
-        </p:spPr>
-        <p:txBody>
-          <a:bodyPr/>
-          <a:lstStyle>
-            <a:lvl1pPr>
-              <a:defRPr sz="800">
-                <a:solidFill>
-                  <a:srgbClr val="777777"/>
-                </a:solidFill>
-                <a:latin typeface="Arial"/>
-                <a:ea typeface="Arial"/>
-                <a:cs typeface="Arial"/>
-              </a:defRPr>
-            </a:lvl1pPr>
-          </a:lstStyle>
-          <a:p>
-            <a:pPr algn="r"/>
-            <a:fld id="{F7021451-1387-4CA6-816F-3879F97B5CBC}" type="slidenum">
-              <a:rPr b="0" lang="en-US"/>
-              <a:t>4</a:t>
-            </a:fld>
-            <a:endParaRPr lang="en-US"/>
-          </a:p>
-        </p:txBody>
-      </p:sp>
-    </p:spTree>
-  </p:cSld>
-  <p:clrMapOvr>
-    <a:masterClrMapping/>
-  </p:clrMapOvr>
-</p:sld>
-</file>
-
-<file path=ppt/slides/slide5.xml><?xml version="1.0" encoding="utf-8"?>
 <p:sld xmlns:a="http://schemas.openxmlformats.org/drawingml/2006/main" xmlns:r="http://schemas.openxmlformats.org/officeDocument/2006/relationships" xmlns:p="http://schemas.openxmlformats.org/presentationml/2006/main">
   <p:cSld name="Slide 5">
     <p:spTree>
@@ -3696,7 +2786,7 @@
           <a:bodyPr wrap="square" lIns="0" tIns="0" rIns="0" bIns="0" rtlCol="0" anchor="ctr"/>
           <a:lstStyle/>
           <a:p>
-            <a:pPr indent="0" marL="0">
+            <a:pPr marL="0" indent="0">
               <a:buNone/>
             </a:pPr>
             <a:r>
@@ -3735,7 +2825,7 @@
           <a:bodyPr wrap="square" lIns="0" tIns="0" rIns="0" bIns="0" rtlCol="0" anchor="ctr"/>
           <a:lstStyle/>
           <a:p>
-            <a:pPr indent="0" marL="0">
+            <a:pPr marL="0" indent="0">
               <a:buNone/>
             </a:pPr>
             <a:r>
@@ -3774,7 +2864,7 @@
           <a:bodyPr wrap="square" lIns="0" tIns="0" rIns="0" bIns="0" rtlCol="0" anchor="ctr"/>
           <a:lstStyle/>
           <a:p>
-            <a:pPr indent="0" marL="0">
+            <a:pPr marL="0" indent="0">
               <a:buNone/>
             </a:pPr>
             <a:r>
@@ -3813,7 +2903,7 @@
           <a:bodyPr wrap="square" lIns="635" tIns="635" rIns="635" bIns="635" rtlCol="0" anchor="ctr"/>
           <a:lstStyle/>
           <a:p>
-            <a:pPr indent="0" marL="0">
+            <a:pPr marL="0" indent="0">
               <a:buNone/>
             </a:pPr>
             <a:r>
@@ -3830,7 +2920,7 @@
             <a:endParaRPr lang="en-US" sz="1700" dirty="0"/>
           </a:p>
           <a:p>
-            <a:pPr indent="0" marL="0">
+            <a:pPr marL="0" indent="0">
               <a:buNone/>
             </a:pPr>
             <a:r>
@@ -3847,7 +2937,7 @@
             <a:endParaRPr lang="en-US" sz="1700" dirty="0"/>
           </a:p>
           <a:p>
-            <a:pPr indent="0" marL="0">
+            <a:pPr marL="0" indent="0">
               <a:buNone/>
             </a:pPr>
             <a:r>
@@ -3864,7 +2954,7 @@
             <a:endParaRPr lang="en-US" sz="1700" dirty="0"/>
           </a:p>
           <a:p>
-            <a:pPr indent="0" marL="0">
+            <a:pPr marL="0" indent="0">
               <a:buNone/>
             </a:pPr>
             <a:r>
@@ -3881,7 +2971,7 @@
             <a:endParaRPr lang="en-US" sz="1700" dirty="0"/>
           </a:p>
           <a:p>
-            <a:pPr indent="0" marL="0">
+            <a:pPr marL="0" indent="0">
               <a:buNone/>
             </a:pPr>
             <a:r>
@@ -3898,7 +2988,7 @@
             <a:endParaRPr lang="en-US" sz="1700" dirty="0"/>
           </a:p>
           <a:p>
-            <a:pPr indent="0" marL="0">
+            <a:pPr marL="0" indent="0">
               <a:buNone/>
             </a:pPr>
             <a:r>
@@ -3915,7 +3005,7 @@
             <a:endParaRPr lang="en-US" sz="1700" dirty="0"/>
           </a:p>
           <a:p>
-            <a:pPr indent="0" marL="0">
+            <a:pPr marL="0" indent="0">
               <a:buNone/>
             </a:pPr>
             <a:r>
@@ -3932,7 +3022,7 @@
             <a:endParaRPr lang="en-US" sz="1700" dirty="0"/>
           </a:p>
           <a:p>
-            <a:pPr indent="0" marL="0">
+            <a:pPr marL="0" indent="0">
               <a:buNone/>
             </a:pPr>
             <a:r>
@@ -3971,7 +3061,7 @@
           <a:bodyPr wrap="square" lIns="0" tIns="0" rIns="0" bIns="0" rtlCol="0" anchor="ctr"/>
           <a:lstStyle/>
           <a:p>
-            <a:pPr indent="0" marL="0">
+            <a:pPr marL="0" indent="0">
               <a:buNone/>
             </a:pPr>
             <a:r>
@@ -4039,7 +3129,7 @@
           </a:bodyPr>
           <a:lstStyle/>
           <a:p>
-            <a:pPr algn="ctr" indent="0" marL="0">
+            <a:pPr marL="0" indent="0" algn="ctr">
               <a:buNone/>
             </a:pPr>
             <a:r>
@@ -4107,7 +3197,7 @@
           </a:bodyPr>
           <a:lstStyle/>
           <a:p>
-            <a:pPr algn="ctr" indent="0" marL="0">
+            <a:pPr marL="0" indent="0" algn="ctr">
               <a:buNone/>
             </a:pPr>
             <a:r>
@@ -4175,7 +3265,7 @@
           </a:bodyPr>
           <a:lstStyle/>
           <a:p>
-            <a:pPr algn="ctr" indent="0" marL="0">
+            <a:pPr marL="0" indent="0" algn="ctr">
               <a:buNone/>
             </a:pPr>
             <a:r>
@@ -4213,7 +3303,7 @@
           </a:prstGeom>
           <a:extLst>
             <a:ext uri="{C572A759-6A51-4108-AA02-DFA0A04FC94B}">
-              <ma14:wrappingTextBoxFlag xmlns:ma14="http://schemas.microsoft.com/office/mac/drawingml/2011/main" val="0"/>
+              <ma14:wrappingTextBoxFlag xmlns="" xmlns:ma14="http://schemas.microsoft.com/office/mac/drawingml/2011/main" val="0"/>
             </a:ext>
           </a:extLst>
         </p:spPr>
@@ -4234,8 +3324,8 @@
           <a:p>
             <a:pPr algn="r"/>
             <a:fld id="{F7021451-1387-4CA6-816F-3879F97B5CBC}" type="slidenum">
-              <a:rPr b="0" lang="en-US"/>
-              <a:t>5</a:t>
+              <a:rPr lang="en-US" b="0"/>
+              <a:t>4</a:t>
             </a:fld>
             <a:endParaRPr lang="en-US"/>
           </a:p>
@@ -4249,7 +3339,7 @@
 </p:sld>
 </file>
 
-<file path=ppt/slides/slide6.xml><?xml version="1.0" encoding="utf-8"?>
+<file path=ppt/slides/slide5.xml><?xml version="1.0" encoding="utf-8"?>
 <p:sld xmlns:a="http://schemas.openxmlformats.org/drawingml/2006/main" xmlns:r="http://schemas.openxmlformats.org/officeDocument/2006/relationships" xmlns:p="http://schemas.openxmlformats.org/presentationml/2006/main">
   <p:cSld name="Slide 6">
     <p:spTree>
@@ -4287,7 +3377,7 @@
           <a:bodyPr wrap="square" lIns="0" tIns="0" rIns="0" bIns="0" rtlCol="0" anchor="ctr"/>
           <a:lstStyle/>
           <a:p>
-            <a:pPr indent="0" marL="0">
+            <a:pPr marL="0" indent="0">
               <a:buNone/>
             </a:pPr>
             <a:r>
@@ -4355,7 +3445,7 @@
           </a:bodyPr>
           <a:lstStyle/>
           <a:p>
-            <a:pPr algn="ctr" indent="0" marL="0">
+            <a:pPr marL="0" indent="0" algn="ctr">
               <a:buNone/>
             </a:pPr>
             <a:r>
@@ -4372,7 +3462,7 @@
             <a:endParaRPr lang="en-US" sz="2100" dirty="0"/>
           </a:p>
           <a:p>
-            <a:pPr algn="ctr" indent="0" marL="0">
+            <a:pPr marL="0" indent="0" algn="ctr">
               <a:buNone/>
             </a:pPr>
             <a:r>
@@ -4440,7 +3530,7 @@
           </a:bodyPr>
           <a:lstStyle/>
           <a:p>
-            <a:pPr algn="ctr" indent="0" marL="0">
+            <a:pPr marL="0" indent="0" algn="ctr">
               <a:buNone/>
             </a:pPr>
             <a:r>
@@ -4457,7 +3547,7 @@
             <a:endParaRPr lang="en-US" sz="2100" dirty="0"/>
           </a:p>
           <a:p>
-            <a:pPr algn="ctr" indent="0" marL="0">
+            <a:pPr marL="0" indent="0" algn="ctr">
               <a:buNone/>
             </a:pPr>
             <a:r>
@@ -4525,7 +3615,7 @@
           </a:bodyPr>
           <a:lstStyle/>
           <a:p>
-            <a:pPr algn="ctr" indent="0" marL="0">
+            <a:pPr marL="0" indent="0" algn="ctr">
               <a:buNone/>
             </a:pPr>
             <a:r>
@@ -4542,7 +3632,7 @@
             <a:endParaRPr lang="en-US" sz="2100" dirty="0"/>
           </a:p>
           <a:p>
-            <a:pPr algn="ctr" indent="0" marL="0">
+            <a:pPr marL="0" indent="0" algn="ctr">
               <a:buNone/>
             </a:pPr>
             <a:r>
@@ -4562,13 +3652,13 @@
       </p:sp>
       <p:sp>
         <p:nvSpPr>
-          <p:cNvPr id="9" name="Text 7"/>
-          <p:cNvSpPr/>
-          <p:nvPr/>
-        </p:nvSpPr>
-        <p:spPr>
-          <a:xfrm>
-            <a:off x="1005840" y="3429000"/>
+          <p:cNvPr id="10" name="Text 8"/>
+          <p:cNvSpPr/>
+          <p:nvPr/>
+        </p:nvSpPr>
+        <p:spPr>
+          <a:xfrm>
+            <a:off x="1005840" y="4251960"/>
             <a:ext cx="10149840" cy="502920"/>
           </a:xfrm>
           <a:prstGeom prst="rect">
@@ -4581,7 +3671,7 @@
           <a:bodyPr wrap="square" lIns="0" tIns="0" rIns="0" bIns="0" rtlCol="0" anchor="ctr"/>
           <a:lstStyle/>
           <a:p>
-            <a:pPr algn="ctr" indent="0" marL="0">
+            <a:pPr marL="0" indent="0" algn="ctr">
               <a:buNone/>
             </a:pPr>
             <a:r>
@@ -4593,7 +3683,7 @@
                 <a:ea typeface="Arial" pitchFamily="34" charset="-122"/>
                 <a:cs typeface="Arial" pitchFamily="34" charset="-120"/>
               </a:rPr>
-              <a:t>Основные классы: Game, CommandParser, AssetManager и CsvReader.</a:t>
+              <a:t>Игра имеет начало, условия поражения и полноценное условие победы.</a:t>
             </a:r>
             <a:endParaRPr lang="en-US" sz="1800" dirty="0"/>
           </a:p>
@@ -4601,13 +3691,13 @@
       </p:sp>
       <p:sp>
         <p:nvSpPr>
-          <p:cNvPr id="10" name="Text 8"/>
-          <p:cNvSpPr/>
-          <p:nvPr/>
-        </p:nvSpPr>
-        <p:spPr>
-          <a:xfrm>
-            <a:off x="1005840" y="4251960"/>
+          <p:cNvPr id="11" name="Text 9"/>
+          <p:cNvSpPr/>
+          <p:nvPr/>
+        </p:nvSpPr>
+        <p:spPr>
+          <a:xfrm>
+            <a:off x="1005840" y="5074920"/>
             <a:ext cx="10149840" cy="502920"/>
           </a:xfrm>
           <a:prstGeom prst="rect">
@@ -4620,46 +3710,7 @@
           <a:bodyPr wrap="square" lIns="0" tIns="0" rIns="0" bIns="0" rtlCol="0" anchor="ctr"/>
           <a:lstStyle/>
           <a:p>
-            <a:pPr algn="ctr" indent="0" marL="0">
-              <a:buNone/>
-            </a:pPr>
-            <a:r>
-              <a:rPr lang="en-US" sz="1800" dirty="0">
-                <a:solidFill>
-                  <a:srgbClr val="3C4043"/>
-                </a:solidFill>
-                <a:latin typeface="Arial" pitchFamily="34" charset="0"/>
-                <a:ea typeface="Arial" pitchFamily="34" charset="-122"/>
-                <a:cs typeface="Arial" pitchFamily="34" charset="-120"/>
-              </a:rPr>
-              <a:t>Игра имеет начало, условия поражения и полноценное условие победы.</a:t>
-            </a:r>
-            <a:endParaRPr lang="en-US" sz="1800" dirty="0"/>
-          </a:p>
-        </p:txBody>
-      </p:sp>
-      <p:sp>
-        <p:nvSpPr>
-          <p:cNvPr id="11" name="Text 9"/>
-          <p:cNvSpPr/>
-          <p:nvPr/>
-        </p:nvSpPr>
-        <p:spPr>
-          <a:xfrm>
-            <a:off x="1005840" y="5074920"/>
-            <a:ext cx="10149840" cy="502920"/>
-          </a:xfrm>
-          <a:prstGeom prst="rect">
-            <a:avLst/>
-          </a:prstGeom>
-          <a:noFill/>
-          <a:ln/>
-        </p:spPr>
-        <p:txBody>
-          <a:bodyPr wrap="square" lIns="0" tIns="0" rIns="0" bIns="0" rtlCol="0" anchor="ctr"/>
-          <a:lstStyle/>
-          <a:p>
-            <a:pPr algn="ctr" indent="0" marL="0">
+            <a:pPr marL="0" indent="0" algn="ctr">
               <a:buNone/>
             </a:pPr>
             <a:r>
@@ -4697,7 +3748,7 @@
           </a:prstGeom>
           <a:extLst>
             <a:ext uri="{C572A759-6A51-4108-AA02-DFA0A04FC94B}">
-              <ma14:wrappingTextBoxFlag xmlns:ma14="http://schemas.microsoft.com/office/mac/drawingml/2011/main" val="0"/>
+              <ma14:wrappingTextBoxFlag xmlns="" xmlns:ma14="http://schemas.microsoft.com/office/mac/drawingml/2011/main" val="0"/>
             </a:ext>
           </a:extLst>
         </p:spPr>
@@ -4718,8 +3769,8 @@
           <a:p>
             <a:pPr algn="r"/>
             <a:fld id="{F7021451-1387-4CA6-816F-3879F97B5CBC}" type="slidenum">
-              <a:rPr b="0" lang="en-US"/>
-              <a:t>6</a:t>
+              <a:rPr lang="en-US" b="0"/>
+              <a:t>5</a:t>
             </a:fld>
             <a:endParaRPr lang="en-US"/>
           </a:p>
@@ -5026,4 +4077,299 @@
     </a:ext>
   </a:extLst>
 </a:theme>
+</file>
+
+<file path=ppt/theme/theme2.xml><?xml version="1.0" encoding="utf-8"?>
+<a:theme xmlns:a="http://schemas.openxmlformats.org/drawingml/2006/main" name="Office Theme">
+  <a:themeElements>
+    <a:clrScheme name="Office">
+      <a:dk1>
+        <a:sysClr val="windowText" lastClr="000000"/>
+      </a:dk1>
+      <a:lt1>
+        <a:sysClr val="window" lastClr="FFFFFF"/>
+      </a:lt1>
+      <a:dk2>
+        <a:srgbClr val="44546A"/>
+      </a:dk2>
+      <a:lt2>
+        <a:srgbClr val="E7E6E6"/>
+      </a:lt2>
+      <a:accent1>
+        <a:srgbClr val="4472C4"/>
+      </a:accent1>
+      <a:accent2>
+        <a:srgbClr val="ED7D31"/>
+      </a:accent2>
+      <a:accent3>
+        <a:srgbClr val="A5A5A5"/>
+      </a:accent3>
+      <a:accent4>
+        <a:srgbClr val="FFC000"/>
+      </a:accent4>
+      <a:accent5>
+        <a:srgbClr val="5B9BD5"/>
+      </a:accent5>
+      <a:accent6>
+        <a:srgbClr val="70AD47"/>
+      </a:accent6>
+      <a:hlink>
+        <a:srgbClr val="0563C1"/>
+      </a:hlink>
+      <a:folHlink>
+        <a:srgbClr val="954F72"/>
+      </a:folHlink>
+    </a:clrScheme>
+    <a:fontScheme name="Office">
+      <a:majorFont>
+        <a:latin typeface="Calibri Light" panose="020F0302020204030204"/>
+        <a:ea typeface=""/>
+        <a:cs typeface=""/>
+        <a:font script="Jpan" typeface="游ゴシック Light"/>
+        <a:font script="Hang" typeface="맑은 고딕"/>
+        <a:font script="Hans" typeface="等线 Light"/>
+        <a:font script="Hant" typeface="新細明體"/>
+        <a:font script="Arab" typeface="Times New Roman"/>
+        <a:font script="Hebr" typeface="Times New Roman"/>
+        <a:font script="Thai" typeface="Angsana New"/>
+        <a:font script="Ethi" typeface="Nyala"/>
+        <a:font script="Beng" typeface="Vrinda"/>
+        <a:font script="Gujr" typeface="Shruti"/>
+        <a:font script="Khmr" typeface="MoolBoran"/>
+        <a:font script="Knda" typeface="Tunga"/>
+        <a:font script="Guru" typeface="Raavi"/>
+        <a:font script="Cans" typeface="Euphemia"/>
+        <a:font script="Cher" typeface="Plantagenet Cherokee"/>
+        <a:font script="Yiii" typeface="Microsoft Yi Baiti"/>
+        <a:font script="Tibt" typeface="Microsoft Himalaya"/>
+        <a:font script="Thaa" typeface="MV Boli"/>
+        <a:font script="Deva" typeface="Mangal"/>
+        <a:font script="Telu" typeface="Gautami"/>
+        <a:font script="Taml" typeface="Latha"/>
+        <a:font script="Syrc" typeface="Estrangelo Edessa"/>
+        <a:font script="Orya" typeface="Kalinga"/>
+        <a:font script="Mlym" typeface="Kartika"/>
+        <a:font script="Laoo" typeface="DokChampa"/>
+        <a:font script="Sinh" typeface="Iskoola Pota"/>
+        <a:font script="Mong" typeface="Mongolian Baiti"/>
+        <a:font script="Viet" typeface="Times New Roman"/>
+        <a:font script="Uigh" typeface="Microsoft Uighur"/>
+        <a:font script="Geor" typeface="Sylfaen"/>
+        <a:font script="Armn" typeface="Arial"/>
+        <a:font script="Bugi" typeface="Leelawadee UI"/>
+        <a:font script="Bopo" typeface="Microsoft JhengHei"/>
+        <a:font script="Java" typeface="Javanese Text"/>
+        <a:font script="Lisu" typeface="Segoe UI"/>
+        <a:font script="Mymr" typeface="Myanmar Text"/>
+        <a:font script="Nkoo" typeface="Ebrima"/>
+        <a:font script="Olck" typeface="Nirmala UI"/>
+        <a:font script="Osma" typeface="Ebrima"/>
+        <a:font script="Phag" typeface="Phagspa"/>
+        <a:font script="Syrn" typeface="Estrangelo Edessa"/>
+        <a:font script="Syrj" typeface="Estrangelo Edessa"/>
+        <a:font script="Syre" typeface="Estrangelo Edessa"/>
+        <a:font script="Sora" typeface="Nirmala UI"/>
+        <a:font script="Tale" typeface="Microsoft Tai Le"/>
+        <a:font script="Talu" typeface="Microsoft New Tai Lue"/>
+        <a:font script="Tfng" typeface="Ebrima"/>
+      </a:majorFont>
+      <a:minorFont>
+        <a:latin typeface="Calibri" panose="020F0502020204030204"/>
+        <a:ea typeface=""/>
+        <a:cs typeface=""/>
+        <a:font script="Jpan" typeface="游ゴシック"/>
+        <a:font script="Hang" typeface="맑은 고딕"/>
+        <a:font script="Hans" typeface="等线"/>
+        <a:font script="Hant" typeface="新細明體"/>
+        <a:font script="Arab" typeface="Arial"/>
+        <a:font script="Hebr" typeface="Arial"/>
+        <a:font script="Thai" typeface="Cordia New"/>
+        <a:font script="Ethi" typeface="Nyala"/>
+        <a:font script="Beng" typeface="Vrinda"/>
+        <a:font script="Gujr" typeface="Shruti"/>
+        <a:font script="Khmr" typeface="DaunPenh"/>
+        <a:font script="Knda" typeface="Tunga"/>
+        <a:font script="Guru" typeface="Raavi"/>
+        <a:font script="Cans" typeface="Euphemia"/>
+        <a:font script="Cher" typeface="Plantagenet Cherokee"/>
+        <a:font script="Yiii" typeface="Microsoft Yi Baiti"/>
+        <a:font script="Tibt" typeface="Microsoft Himalaya"/>
+        <a:font script="Thaa" typeface="MV Boli"/>
+        <a:font script="Deva" typeface="Mangal"/>
+        <a:font script="Telu" typeface="Gautami"/>
+        <a:font script="Taml" typeface="Latha"/>
+        <a:font script="Syrc" typeface="Estrangelo Edessa"/>
+        <a:font script="Orya" typeface="Kalinga"/>
+        <a:font script="Mlym" typeface="Kartika"/>
+        <a:font script="Laoo" typeface="DokChampa"/>
+        <a:font script="Sinh" typeface="Iskoola Pota"/>
+        <a:font script="Mong" typeface="Mongolian Baiti"/>
+        <a:font script="Viet" typeface="Arial"/>
+        <a:font script="Uigh" typeface="Microsoft Uighur"/>
+        <a:font script="Geor" typeface="Sylfaen"/>
+        <a:font script="Armn" typeface="Arial"/>
+        <a:font script="Bugi" typeface="Leelawadee UI"/>
+        <a:font script="Bopo" typeface="Microsoft JhengHei"/>
+        <a:font script="Java" typeface="Javanese Text"/>
+        <a:font script="Lisu" typeface="Segoe UI"/>
+        <a:font script="Mymr" typeface="Myanmar Text"/>
+        <a:font script="Nkoo" typeface="Ebrima"/>
+        <a:font script="Olck" typeface="Nirmala UI"/>
+        <a:font script="Osma" typeface="Ebrima"/>
+        <a:font script="Phag" typeface="Phagspa"/>
+        <a:font script="Syrn" typeface="Estrangelo Edessa"/>
+        <a:font script="Syrj" typeface="Estrangelo Edessa"/>
+        <a:font script="Syre" typeface="Estrangelo Edessa"/>
+        <a:font script="Sora" typeface="Nirmala UI"/>
+        <a:font script="Tale" typeface="Microsoft Tai Le"/>
+        <a:font script="Talu" typeface="Microsoft New Tai Lue"/>
+        <a:font script="Tfng" typeface="Ebrima"/>
+      </a:minorFont>
+    </a:fontScheme>
+    <a:fmtScheme name="Office">
+      <a:fillStyleLst>
+        <a:solidFill>
+          <a:schemeClr val="phClr"/>
+        </a:solidFill>
+        <a:gradFill rotWithShape="1">
+          <a:gsLst>
+            <a:gs pos="0">
+              <a:schemeClr val="phClr">
+                <a:lumMod val="110000"/>
+                <a:satMod val="105000"/>
+                <a:tint val="67000"/>
+              </a:schemeClr>
+            </a:gs>
+            <a:gs pos="50000">
+              <a:schemeClr val="phClr">
+                <a:lumMod val="105000"/>
+                <a:satMod val="103000"/>
+                <a:tint val="73000"/>
+              </a:schemeClr>
+            </a:gs>
+            <a:gs pos="100000">
+              <a:schemeClr val="phClr">
+                <a:lumMod val="105000"/>
+                <a:satMod val="109000"/>
+                <a:tint val="81000"/>
+              </a:schemeClr>
+            </a:gs>
+          </a:gsLst>
+          <a:lin ang="5400000" scaled="0"/>
+        </a:gradFill>
+        <a:gradFill rotWithShape="1">
+          <a:gsLst>
+            <a:gs pos="0">
+              <a:schemeClr val="phClr">
+                <a:satMod val="103000"/>
+                <a:lumMod val="102000"/>
+                <a:tint val="94000"/>
+              </a:schemeClr>
+            </a:gs>
+            <a:gs pos="50000">
+              <a:schemeClr val="phClr">
+                <a:satMod val="110000"/>
+                <a:lumMod val="100000"/>
+                <a:shade val="100000"/>
+              </a:schemeClr>
+            </a:gs>
+            <a:gs pos="100000">
+              <a:schemeClr val="phClr">
+                <a:lumMod val="99000"/>
+                <a:satMod val="120000"/>
+                <a:shade val="78000"/>
+              </a:schemeClr>
+            </a:gs>
+          </a:gsLst>
+          <a:lin ang="5400000" scaled="0"/>
+        </a:gradFill>
+      </a:fillStyleLst>
+      <a:lnStyleLst>
+        <a:ln w="6350" cap="flat" cmpd="sng" algn="ctr">
+          <a:solidFill>
+            <a:schemeClr val="phClr"/>
+          </a:solidFill>
+          <a:prstDash val="solid"/>
+          <a:miter lim="800000"/>
+        </a:ln>
+        <a:ln w="12700" cap="flat" cmpd="sng" algn="ctr">
+          <a:solidFill>
+            <a:schemeClr val="phClr"/>
+          </a:solidFill>
+          <a:prstDash val="solid"/>
+          <a:miter lim="800000"/>
+        </a:ln>
+        <a:ln w="19050" cap="flat" cmpd="sng" algn="ctr">
+          <a:solidFill>
+            <a:schemeClr val="phClr"/>
+          </a:solidFill>
+          <a:prstDash val="solid"/>
+          <a:miter lim="800000"/>
+        </a:ln>
+      </a:lnStyleLst>
+      <a:effectStyleLst>
+        <a:effectStyle>
+          <a:effectLst/>
+        </a:effectStyle>
+        <a:effectStyle>
+          <a:effectLst/>
+        </a:effectStyle>
+        <a:effectStyle>
+          <a:effectLst>
+            <a:outerShdw blurRad="57150" dist="19050" dir="5400000" algn="ctr" rotWithShape="0">
+              <a:srgbClr val="000000">
+                <a:alpha val="63000"/>
+              </a:srgbClr>
+            </a:outerShdw>
+          </a:effectLst>
+        </a:effectStyle>
+      </a:effectStyleLst>
+      <a:bgFillStyleLst>
+        <a:solidFill>
+          <a:schemeClr val="phClr"/>
+        </a:solidFill>
+        <a:solidFill>
+          <a:schemeClr val="phClr">
+            <a:tint val="95000"/>
+            <a:satMod val="170000"/>
+          </a:schemeClr>
+        </a:solidFill>
+        <a:gradFill rotWithShape="1">
+          <a:gsLst>
+            <a:gs pos="0">
+              <a:schemeClr val="phClr">
+                <a:tint val="93000"/>
+                <a:satMod val="150000"/>
+                <a:shade val="98000"/>
+                <a:lumMod val="102000"/>
+              </a:schemeClr>
+            </a:gs>
+            <a:gs pos="50000">
+              <a:schemeClr val="phClr">
+                <a:tint val="98000"/>
+                <a:satMod val="130000"/>
+                <a:shade val="90000"/>
+                <a:lumMod val="103000"/>
+              </a:schemeClr>
+            </a:gs>
+            <a:gs pos="100000">
+              <a:schemeClr val="phClr">
+                <a:shade val="63000"/>
+                <a:satMod val="120000"/>
+              </a:schemeClr>
+            </a:gs>
+          </a:gsLst>
+          <a:lin ang="5400000" scaled="0"/>
+        </a:gradFill>
+      </a:bgFillStyleLst>
+    </a:fmtScheme>
+  </a:themeElements>
+  <a:objectDefaults/>
+  <a:extraClrSchemeLst/>
+  <a:extLst>
+    <a:ext uri="{05A4C25C-085E-4340-85A3-A5531E510DB2}">
+      <thm15:themeFamily xmlns:thm15="http://schemas.microsoft.com/office/thememl/2012/main" name="Office Theme" id="{62F939B6-93AF-4DB8-9C6B-D6C7DFDC589F}" vid="{4A3C46E8-61CC-4603-A589-7422A47A8E4A}"/>
+    </a:ext>
+  </a:extLst>
+</a:theme>
 </file>